--- a/Hospital_Appointment_Booking_Presentation.pptx
+++ b/Hospital_Appointment_Booking_Presentation.pptx
@@ -249,7 +249,7 @@
           <a:p>
             <a:fld id="{43472FC0-3A6E-4FDF-98C7-05D53ADA3185}" type="datetimeFigureOut">
               <a:rPr lang="en-US" smtClean="0"/>
-              <a:t>10/29/2025</a:t>
+              <a:t>12/18/2025</a:t>
             </a:fld>
             <a:endParaRPr lang="en-US"/>
           </a:p>
@@ -414,7 +414,7 @@
           <a:p>
             <a:fld id="{D5F44B48-72A2-4A15-9A9B-0DA2BF7C6B02}" type="datetimeFigureOut">
               <a:rPr lang="en-US" smtClean="0"/>
-              <a:t>10/29/2025</a:t>
+              <a:t>12/18/2025</a:t>
             </a:fld>
             <a:endParaRPr lang="en-US"/>
           </a:p>
@@ -936,7 +936,7 @@
           <a:p>
             <a:fld id="{B3BD94B3-44B9-44B7-85A7-F056FA607D46}" type="datetime3">
               <a:rPr lang="en-US" smtClean="0"/>
-              <a:t>29 October 2025</a:t>
+              <a:t>18 December 2025</a:t>
             </a:fld>
             <a:endParaRPr lang="en-US"/>
           </a:p>
@@ -1102,7 +1102,7 @@
           <a:p>
             <a:fld id="{C6B910C5-081D-4FA6-9B78-BB56BEB475DD}" type="datetime3">
               <a:rPr lang="en-US" smtClean="0"/>
-              <a:t>29 October 2025</a:t>
+              <a:t>18 December 2025</a:t>
             </a:fld>
             <a:endParaRPr lang="en-US"/>
           </a:p>
@@ -1278,7 +1278,7 @@
           <a:p>
             <a:fld id="{418360AF-72BE-4445-B200-736511B20555}" type="datetime3">
               <a:rPr lang="en-US" smtClean="0"/>
-              <a:t>29 October 2025</a:t>
+              <a:t>18 December 2025</a:t>
             </a:fld>
             <a:endParaRPr lang="en-US"/>
           </a:p>
@@ -1450,7 +1450,7 @@
           <a:p>
             <a:fld id="{10B6530B-5C68-4965-B8A9-8C18D26903BD}" type="datetime3">
               <a:rPr lang="en-US" smtClean="0"/>
-              <a:t>29 October 2025</a:t>
+              <a:t>18 December 2025</a:t>
             </a:fld>
             <a:endParaRPr lang="en-US" dirty="0"/>
           </a:p>
@@ -1637,7 +1637,7 @@
           <a:p>
             <a:fld id="{EB7275DB-6D13-480B-AC77-F5019BDC5287}" type="datetime3">
               <a:rPr lang="en-US" smtClean="0"/>
-              <a:t>29 October 2025</a:t>
+              <a:t>18 December 2025</a:t>
             </a:fld>
             <a:endParaRPr lang="en-US"/>
           </a:p>
@@ -1880,7 +1880,7 @@
           <a:p>
             <a:fld id="{9B2A365F-315E-4D26-B736-3944439F5E09}" type="datetime3">
               <a:rPr lang="en-US" smtClean="0"/>
-              <a:t>29 October 2025</a:t>
+              <a:t>18 December 2025</a:t>
             </a:fld>
             <a:endParaRPr lang="en-US"/>
           </a:p>
@@ -2163,7 +2163,7 @@
           <a:p>
             <a:fld id="{9AB1E7AE-CF1A-4AE7-BD2C-F950D278A3DB}" type="datetime3">
               <a:rPr lang="en-US" smtClean="0"/>
-              <a:t>29 October 2025</a:t>
+              <a:t>18 December 2025</a:t>
             </a:fld>
             <a:endParaRPr lang="en-US"/>
           </a:p>
@@ -2580,7 +2580,7 @@
           <a:p>
             <a:fld id="{2C6D51F8-804C-441D-85CA-D64DC6F78406}" type="datetime3">
               <a:rPr lang="en-US" smtClean="0"/>
-              <a:t>29 October 2025</a:t>
+              <a:t>18 December 2025</a:t>
             </a:fld>
             <a:endParaRPr lang="en-US"/>
           </a:p>
@@ -2695,7 +2695,7 @@
           <a:p>
             <a:fld id="{B97CCCDB-4457-4C48-985F-BD1C33DF88D2}" type="datetime3">
               <a:rPr lang="en-US" smtClean="0"/>
-              <a:t>29 October 2025</a:t>
+              <a:t>18 December 2025</a:t>
             </a:fld>
             <a:endParaRPr lang="en-US"/>
           </a:p>
@@ -2788,7 +2788,7 @@
           <a:p>
             <a:fld id="{C3F4AF7E-7813-4879-8B55-5575B0080D39}" type="datetime3">
               <a:rPr lang="en-US" smtClean="0"/>
-              <a:t>29 October 2025</a:t>
+              <a:t>18 December 2025</a:t>
             </a:fld>
             <a:endParaRPr lang="en-US"/>
           </a:p>
@@ -3061,7 +3061,7 @@
           <a:p>
             <a:fld id="{19EC94D0-F97F-48E4-A142-9DA614267486}" type="datetime3">
               <a:rPr lang="en-US" smtClean="0"/>
-              <a:t>29 October 2025</a:t>
+              <a:t>18 December 2025</a:t>
             </a:fld>
             <a:endParaRPr lang="en-US"/>
           </a:p>
@@ -3311,7 +3311,7 @@
           <a:p>
             <a:fld id="{557DA9B2-FBCA-4233-9590-C0754509BDB5}" type="datetime3">
               <a:rPr lang="en-US" smtClean="0"/>
-              <a:t>29 October 2025</a:t>
+              <a:t>18 December 2025</a:t>
             </a:fld>
             <a:endParaRPr lang="en-US"/>
           </a:p>
@@ -3520,7 +3520,7 @@
           <a:p>
             <a:fld id="{484D4881-3C1B-4E10-8E47-87CE42F43D14}" type="datetime3">
               <a:rPr lang="en-US" smtClean="0"/>
-              <a:t>29 October 2025</a:t>
+              <a:t>18 December 2025</a:t>
             </a:fld>
             <a:endParaRPr lang="en-US"/>
           </a:p>
@@ -4085,7 +4085,7 @@
           <a:p>
             <a:fld id="{264FFBAA-9A17-4F9A-B1BD-20F0F5B52AB6}" type="datetime3">
               <a:rPr lang="en-US" smtClean="0"/>
-              <a:t>29 October 2025</a:t>
+              <a:t>18 December 2025</a:t>
             </a:fld>
             <a:endParaRPr lang="en-US" dirty="0"/>
           </a:p>
@@ -4227,7 +4227,7 @@
         </p:spPr>
         <p:txBody>
           <a:bodyPr vert="horz" lIns="91440" tIns="45720" rIns="91440" bIns="45720" rtlCol="0">
-            <a:normAutofit/>
+            <a:normAutofit fontScale="85000" lnSpcReduction="10000"/>
           </a:bodyPr>
           <a:lstStyle>
             <a:lvl1pPr marL="0" indent="0" algn="ctr" defTabSz="914400" rtl="0" eaLnBrk="1" latinLnBrk="0" hangingPunct="1">
@@ -4403,7 +4403,29 @@
                   <a:schemeClr val="tx1"/>
                 </a:solidFill>
               </a:rPr>
-              <a:t>Sanjana V,  43110811                         					</a:t>
+              <a:t>Sanjana V,  43110811</a:t>
+            </a:r>
+          </a:p>
+          <a:p>
+            <a:pPr algn="l"/>
+            <a:r>
+              <a:rPr lang="en-US" sz="2000" b="1" dirty="0">
+                <a:solidFill>
+                  <a:schemeClr val="tx1"/>
+                </a:solidFill>
+              </a:rPr>
+              <a:t>Subiksha R,43110897</a:t>
+            </a:r>
+          </a:p>
+          <a:p>
+            <a:pPr algn="l"/>
+            <a:r>
+              <a:rPr lang="en-US" sz="2000" b="1" dirty="0">
+                <a:solidFill>
+                  <a:schemeClr val="tx1"/>
+                </a:solidFill>
+              </a:rPr>
+              <a:t>Sri Saranya S T S,43110889                         					</a:t>
             </a:r>
             <a:endParaRPr lang="en-GB" sz="2000" dirty="0">
               <a:solidFill>
@@ -5462,7 +5484,7 @@
           <a:p>
             <a:fld id="{EB7275DB-6D13-480B-AC77-F5019BDC5287}" type="datetime3">
               <a:rPr lang="en-US" smtClean="0"/>
-              <a:t>29 October 2025</a:t>
+              <a:t>18 December 2025</a:t>
             </a:fld>
             <a:endParaRPr lang="en-US"/>
           </a:p>
@@ -5638,11 +5660,28 @@
         </p:nvSpPr>
         <p:spPr/>
         <p:txBody>
-          <a:bodyPr/>
-          <a:lstStyle/>
-          <a:p>
-            <a:r>
-              <a:t>In the existing system, hospital appointment booking is often done manually or through individual hospital websites. Users have to visit multiple websites or physically visit hospitals to check doctor availability, which is time-consuming. Data management and appointment tracking are also inefficient, leading to patient inconvenience.</a:t>
+          <a:bodyPr>
+            <a:normAutofit lnSpcReduction="10000"/>
+          </a:bodyPr>
+          <a:lstStyle/>
+          <a:p>
+            <a:r>
+              <a:rPr dirty="0"/>
+              <a:t>In the existing system, hospital appointment booking is often done manually or through individual hospital websites. </a:t>
+            </a:r>
+            <a:endParaRPr lang="en-IN" dirty="0"/>
+          </a:p>
+          <a:p>
+            <a:r>
+              <a:rPr dirty="0"/>
+              <a:t>Users have to visit multiple websites or physically visit hospitals to check doctor availability, which is time-consuming. </a:t>
+            </a:r>
+            <a:endParaRPr lang="en-IN" dirty="0"/>
+          </a:p>
+          <a:p>
+            <a:r>
+              <a:rPr dirty="0"/>
+              <a:t>Data management and appointment tracking are also inefficient, leading to patient inconvenience.</a:t>
             </a:r>
           </a:p>
         </p:txBody>
@@ -5705,11 +5744,28 @@
         </p:nvSpPr>
         <p:spPr/>
         <p:txBody>
-          <a:bodyPr/>
-          <a:lstStyle/>
-          <a:p>
-            <a:r>
-              <a:t>The proposed system automates hospital appointment booking through a centralized platform. Users can select their city, filter hospitals, view available doctors, and book appointments instantly. The system provides real-time updates, confirmation messages, and efficient hospital-patient communication.</a:t>
+          <a:bodyPr>
+            <a:normAutofit lnSpcReduction="10000"/>
+          </a:bodyPr>
+          <a:lstStyle/>
+          <a:p>
+            <a:r>
+              <a:rPr dirty="0"/>
+              <a:t>The proposed system automates hospital appointment booking through a centralized platform. </a:t>
+            </a:r>
+            <a:endParaRPr lang="en-IN" dirty="0"/>
+          </a:p>
+          <a:p>
+            <a:r>
+              <a:rPr dirty="0"/>
+              <a:t>Users can select their city, filter hospitals, view available doctors, and book appointments instantly. </a:t>
+            </a:r>
+            <a:endParaRPr lang="en-IN" dirty="0"/>
+          </a:p>
+          <a:p>
+            <a:r>
+              <a:rPr dirty="0"/>
+              <a:t>The system provides real-time updates, confirmation messages, and efficient hospital-patient communication.</a:t>
             </a:r>
           </a:p>
         </p:txBody>
